--- a/ClassMaterials/ReusableCode/Slides/Part4-Inheritance.pptx
+++ b/ClassMaterials/ReusableCode/Slides/Part4-Inheritance.pptx
@@ -5,10 +5,10 @@
     <p:sldMasterId id="2147484251" r:id="rId4"/>
   </p:sldMasterIdLst>
   <p:notesMasterIdLst>
-    <p:notesMasterId r:id="rId29"/>
+    <p:notesMasterId r:id="rId23"/>
   </p:notesMasterIdLst>
   <p:handoutMasterIdLst>
-    <p:handoutMasterId r:id="rId30"/>
+    <p:handoutMasterId r:id="rId24"/>
   </p:handoutMasterIdLst>
   <p:sldIdLst>
     <p:sldId id="256" r:id="rId5"/>
@@ -29,12 +29,6 @@
     <p:sldId id="392" r:id="rId20"/>
     <p:sldId id="378" r:id="rId21"/>
     <p:sldId id="380" r:id="rId22"/>
-    <p:sldId id="389" r:id="rId23"/>
-    <p:sldId id="379" r:id="rId24"/>
-    <p:sldId id="388" r:id="rId25"/>
-    <p:sldId id="396" r:id="rId26"/>
-    <p:sldId id="381" r:id="rId27"/>
-    <p:sldId id="390" r:id="rId28"/>
   </p:sldIdLst>
   <p:sldSz cx="9144000" cy="6858000" type="screen4x3"/>
   <p:notesSz cx="7010400" cy="9296400"/>
@@ -2491,152 +2485,6 @@
 </p:notes>
 </file>
 
-<file path=ppt/notesSlides/notesSlide19.xml><?xml version="1.0" encoding="utf-8"?>
-<p:notes xmlns:a="http://schemas.openxmlformats.org/drawingml/2006/main" xmlns:r="http://schemas.openxmlformats.org/officeDocument/2006/relationships" xmlns:p="http://schemas.openxmlformats.org/presentationml/2006/main">
-  <p:cSld>
-    <p:spTree>
-      <p:nvGrpSpPr>
-        <p:cNvPr id="1" name=""/>
-        <p:cNvGrpSpPr/>
-        <p:nvPr/>
-      </p:nvGrpSpPr>
-      <p:grpSpPr>
-        <a:xfrm>
-          <a:off x="0" y="0"/>
-          <a:ext cx="0" cy="0"/>
-          <a:chOff x="0" y="0"/>
-          <a:chExt cx="0" cy="0"/>
-        </a:xfrm>
-      </p:grpSpPr>
-      <p:sp>
-        <p:nvSpPr>
-          <p:cNvPr id="2" name="Slide Image Placeholder 1"/>
-          <p:cNvSpPr>
-            <a:spLocks noGrp="1" noRot="1" noChangeAspect="1"/>
-          </p:cNvSpPr>
-          <p:nvPr>
-            <p:ph type="sldImg"/>
-          </p:nvPr>
-        </p:nvSpPr>
-        <p:spPr/>
-      </p:sp>
-      <p:sp>
-        <p:nvSpPr>
-          <p:cNvPr id="3" name="Notes Placeholder 2"/>
-          <p:cNvSpPr>
-            <a:spLocks noGrp="1"/>
-          </p:cNvSpPr>
-          <p:nvPr>
-            <p:ph type="body" idx="1"/>
-          </p:nvPr>
-        </p:nvSpPr>
-        <p:spPr/>
-        <p:txBody>
-          <a:bodyPr/>
-          <a:lstStyle/>
-          <a:p>
-            <a:r>
-              <a:rPr lang="en-US" baseline="0"/>
-              <a:t>Walk through the Chess example in Inheritance project. Start by showing the King and </a:t>
-            </a:r>
-            <a:r>
-              <a:rPr lang="en-US" baseline="0" err="1"/>
-              <a:t>ChessPiece</a:t>
-            </a:r>
-            <a:r>
-              <a:rPr lang="en-US" baseline="0"/>
-              <a:t> interface. Implement the queen, and note to the students how we end up copying a lot of code from the King into the Queen, there has to be a better way…</a:t>
-            </a:r>
-          </a:p>
-          <a:p>
-            <a:endParaRPr lang="en-US" baseline="0"/>
-          </a:p>
-          <a:p>
-            <a:r>
-              <a:rPr lang="en-US" baseline="0"/>
-              <a:t>It works well to just make the </a:t>
-            </a:r>
-            <a:r>
-              <a:rPr lang="en-US" baseline="0" err="1"/>
-              <a:t>ChessPiece</a:t>
-            </a:r>
-            <a:r>
-              <a:rPr lang="en-US" baseline="0"/>
-              <a:t> a class first and put in a </a:t>
-            </a:r>
-            <a:r>
-              <a:rPr lang="en-US" baseline="0" err="1"/>
-              <a:t>System.err.println</a:t>
-            </a:r>
-            <a:r>
-              <a:rPr lang="en-US" baseline="0"/>
-              <a:t>(“Implement this method!”) then show them if we forget to implement a method (Queen’s </a:t>
-            </a:r>
-            <a:r>
-              <a:rPr lang="en-US" baseline="0" err="1"/>
-              <a:t>checkMove</a:t>
-            </a:r>
-            <a:r>
-              <a:rPr lang="en-US" baseline="0"/>
-              <a:t>) we see that message at runtime.</a:t>
-            </a:r>
-          </a:p>
-          <a:p>
-            <a:endParaRPr lang="en-US" baseline="0"/>
-          </a:p>
-          <a:p>
-            <a:r>
-              <a:rPr lang="en-US" sz="1400" baseline="0"/>
-              <a:t>At this point, they should see the justification for an abstract class, show that on next slide</a:t>
-            </a:r>
-          </a:p>
-          <a:p>
-            <a:endParaRPr lang="en-US"/>
-          </a:p>
-        </p:txBody>
-      </p:sp>
-      <p:sp>
-        <p:nvSpPr>
-          <p:cNvPr id="4" name="Slide Number Placeholder 3"/>
-          <p:cNvSpPr>
-            <a:spLocks noGrp="1"/>
-          </p:cNvSpPr>
-          <p:nvPr>
-            <p:ph type="sldNum" sz="quarter" idx="10"/>
-          </p:nvPr>
-        </p:nvSpPr>
-        <p:spPr/>
-        <p:txBody>
-          <a:bodyPr/>
-          <a:lstStyle/>
-          <a:p>
-            <a:pPr>
-              <a:defRPr/>
-            </a:pPr>
-            <a:fld id="{3A187583-0EC9-4694-9EAD-0DA64A27677E}" type="slidenum">
-              <a:rPr lang="en-US" smtClean="0"/>
-              <a:pPr>
-                <a:defRPr/>
-              </a:pPr>
-              <a:t>19</a:t>
-            </a:fld>
-            <a:endParaRPr lang="en-US"/>
-          </a:p>
-        </p:txBody>
-      </p:sp>
-    </p:spTree>
-    <p:extLst>
-      <p:ext uri="{BB962C8B-B14F-4D97-AF65-F5344CB8AC3E}">
-        <p14:creationId xmlns:p14="http://schemas.microsoft.com/office/powerpoint/2010/main" val="220594822"/>
-      </p:ext>
-    </p:extLst>
-  </p:cSld>
-  <p:clrMapOvr>
-    <a:masterClrMapping/>
-  </p:clrMapOvr>
-</p:notes>
-</file>
-
 <file path=ppt/notesSlides/notesSlide2.xml><?xml version="1.0" encoding="utf-8"?>
 <p:notes xmlns:a="http://schemas.openxmlformats.org/drawingml/2006/main" xmlns:r="http://schemas.openxmlformats.org/officeDocument/2006/relationships" xmlns:p="http://schemas.openxmlformats.org/presentationml/2006/main">
   <p:cSld>
@@ -2728,990 +2576,6 @@
     <p:extLst>
       <p:ext uri="{BB962C8B-B14F-4D97-AF65-F5344CB8AC3E}">
         <p14:creationId xmlns:p14="http://schemas.microsoft.com/office/powerpoint/2010/main" val="1728655107"/>
-      </p:ext>
-    </p:extLst>
-  </p:cSld>
-  <p:clrMapOvr>
-    <a:masterClrMapping/>
-  </p:clrMapOvr>
-</p:notes>
-</file>
-
-<file path=ppt/notesSlides/notesSlide20.xml><?xml version="1.0" encoding="utf-8"?>
-<p:notes xmlns:a="http://schemas.openxmlformats.org/drawingml/2006/main" xmlns:r="http://schemas.openxmlformats.org/officeDocument/2006/relationships" xmlns:p="http://schemas.openxmlformats.org/presentationml/2006/main">
-  <p:cSld>
-    <p:spTree>
-      <p:nvGrpSpPr>
-        <p:cNvPr id="1" name=""/>
-        <p:cNvGrpSpPr/>
-        <p:nvPr/>
-      </p:nvGrpSpPr>
-      <p:grpSpPr>
-        <a:xfrm>
-          <a:off x="0" y="0"/>
-          <a:ext cx="0" cy="0"/>
-          <a:chOff x="0" y="0"/>
-          <a:chExt cx="0" cy="0"/>
-        </a:xfrm>
-      </p:grpSpPr>
-      <p:sp>
-        <p:nvSpPr>
-          <p:cNvPr id="2" name="Slide Image Placeholder 1"/>
-          <p:cNvSpPr>
-            <a:spLocks noGrp="1" noRot="1" noChangeAspect="1"/>
-          </p:cNvSpPr>
-          <p:nvPr>
-            <p:ph type="sldImg"/>
-          </p:nvPr>
-        </p:nvSpPr>
-        <p:spPr/>
-      </p:sp>
-      <p:sp>
-        <p:nvSpPr>
-          <p:cNvPr id="3" name="Notes Placeholder 2"/>
-          <p:cNvSpPr>
-            <a:spLocks noGrp="1"/>
-          </p:cNvSpPr>
-          <p:nvPr>
-            <p:ph type="body" idx="1"/>
-          </p:nvPr>
-        </p:nvSpPr>
-        <p:spPr/>
-        <p:txBody>
-          <a:bodyPr>
-            <a:normAutofit/>
-          </a:bodyPr>
-          <a:lstStyle/>
-          <a:p>
-            <a:r>
-              <a:rPr lang="en-US"/>
-              <a:t>The main reason for using Abstract classes is to force programmers to create</a:t>
-            </a:r>
-            <a:r>
-              <a:rPr lang="en-US" baseline="0"/>
-              <a:t> subclasses. Declaring certain methods abstract prevents you from coming up with useless default methods that others might inherit by accident.</a:t>
-            </a:r>
-          </a:p>
-          <a:p>
-            <a:endParaRPr lang="en-US" baseline="0"/>
-          </a:p>
-          <a:p>
-            <a:r>
-              <a:rPr lang="en-US" baseline="0"/>
-              <a:t>This also allows code reuse when only a few methods of an interface differ in implementation. </a:t>
-            </a:r>
-          </a:p>
-          <a:p>
-            <a:endParaRPr lang="en-US" baseline="0"/>
-          </a:p>
-          <a:p>
-            <a:r>
-              <a:rPr lang="en-US" sz="1200" baseline="0"/>
-              <a:t>Make the </a:t>
-            </a:r>
-            <a:r>
-              <a:rPr lang="en-US" sz="1200" baseline="0" err="1"/>
-              <a:t>ChessPiece</a:t>
-            </a:r>
-            <a:r>
-              <a:rPr lang="en-US" sz="1200" baseline="0"/>
-              <a:t> abstract, and pull the items that don’t change into the new abstract class, and leave the other methods abstract (see solution code). Walk students through this refactor for King/Queen, then have them implement the other pieces. Remind them that the Pawn is actually the hardest, and to do </a:t>
-            </a:r>
-            <a:r>
-              <a:rPr lang="en-US" baseline="0"/>
-              <a:t>that LAST. </a:t>
-            </a:r>
-          </a:p>
-          <a:p>
-            <a:endParaRPr lang="en-US"/>
-          </a:p>
-          <a:p>
-            <a:endParaRPr lang="en-US" baseline="0"/>
-          </a:p>
-        </p:txBody>
-      </p:sp>
-      <p:sp>
-        <p:nvSpPr>
-          <p:cNvPr id="4" name="Slide Number Placeholder 3"/>
-          <p:cNvSpPr>
-            <a:spLocks noGrp="1"/>
-          </p:cNvSpPr>
-          <p:nvPr>
-            <p:ph type="sldNum" sz="quarter" idx="10"/>
-          </p:nvPr>
-        </p:nvSpPr>
-        <p:spPr/>
-        <p:txBody>
-          <a:bodyPr/>
-          <a:lstStyle/>
-          <a:p>
-            <a:pPr>
-              <a:defRPr/>
-            </a:pPr>
-            <a:fld id="{3A187583-0EC9-4694-9EAD-0DA64A27677E}" type="slidenum">
-              <a:rPr lang="en-US" smtClean="0"/>
-              <a:pPr>
-                <a:defRPr/>
-              </a:pPr>
-              <a:t>20</a:t>
-            </a:fld>
-            <a:endParaRPr lang="en-US"/>
-          </a:p>
-        </p:txBody>
-      </p:sp>
-    </p:spTree>
-    <p:extLst>
-      <p:ext uri="{BB962C8B-B14F-4D97-AF65-F5344CB8AC3E}">
-        <p14:creationId xmlns:p14="http://schemas.microsoft.com/office/powerpoint/2010/main" val="3531102198"/>
-      </p:ext>
-    </p:extLst>
-  </p:cSld>
-  <p:clrMapOvr>
-    <a:masterClrMapping/>
-  </p:clrMapOvr>
-</p:notes>
-</file>
-
-<file path=ppt/notesSlides/notesSlide21.xml><?xml version="1.0" encoding="utf-8"?>
-<p:notes xmlns:a="http://schemas.openxmlformats.org/drawingml/2006/main" xmlns:r="http://schemas.openxmlformats.org/officeDocument/2006/relationships" xmlns:p="http://schemas.openxmlformats.org/presentationml/2006/main">
-  <p:cSld>
-    <p:spTree>
-      <p:nvGrpSpPr>
-        <p:cNvPr id="1" name=""/>
-        <p:cNvGrpSpPr/>
-        <p:nvPr/>
-      </p:nvGrpSpPr>
-      <p:grpSpPr>
-        <a:xfrm>
-          <a:off x="0" y="0"/>
-          <a:ext cx="0" cy="0"/>
-          <a:chOff x="0" y="0"/>
-          <a:chExt cx="0" cy="0"/>
-        </a:xfrm>
-      </p:grpSpPr>
-      <p:sp>
-        <p:nvSpPr>
-          <p:cNvPr id="2" name="Slide Image Placeholder 1"/>
-          <p:cNvSpPr>
-            <a:spLocks noGrp="1" noRot="1" noChangeAspect="1"/>
-          </p:cNvSpPr>
-          <p:nvPr>
-            <p:ph type="sldImg"/>
-          </p:nvPr>
-        </p:nvSpPr>
-        <p:spPr/>
-      </p:sp>
-      <p:sp>
-        <p:nvSpPr>
-          <p:cNvPr id="3" name="Notes Placeholder 2"/>
-          <p:cNvSpPr>
-            <a:spLocks noGrp="1"/>
-          </p:cNvSpPr>
-          <p:nvPr>
-            <p:ph type="body" idx="1"/>
-          </p:nvPr>
-        </p:nvSpPr>
-        <p:spPr/>
-        <p:txBody>
-          <a:bodyPr/>
-          <a:lstStyle/>
-          <a:p>
-            <a:r>
-              <a:rPr lang="en-US" sz="1200" kern="1200">
-                <a:solidFill>
-                  <a:schemeClr val="tx1"/>
-                </a:solidFill>
-                <a:latin typeface="+mn-lt"/>
-                <a:ea typeface="+mn-ea"/>
-                <a:cs typeface="+mn-cs"/>
-              </a:rPr>
-              <a:t>Emphasize</a:t>
-            </a:r>
-            <a:r>
-              <a:rPr lang="en-US" sz="1200" kern="1200" baseline="0">
-                <a:solidFill>
-                  <a:schemeClr val="tx1"/>
-                </a:solidFill>
-                <a:latin typeface="+mn-lt"/>
-                <a:ea typeface="+mn-ea"/>
-                <a:cs typeface="+mn-cs"/>
-              </a:rPr>
-              <a:t> doing Pawn last it requires several things (</a:t>
-            </a:r>
-            <a:r>
-              <a:rPr lang="en-US" sz="1200" kern="1200" baseline="0" err="1">
-                <a:solidFill>
-                  <a:schemeClr val="tx1"/>
-                </a:solidFill>
-                <a:latin typeface="+mn-lt"/>
-                <a:ea typeface="+mn-ea"/>
-                <a:cs typeface="+mn-cs"/>
-              </a:rPr>
-              <a:t>hasMoved</a:t>
-            </a:r>
-            <a:r>
-              <a:rPr lang="en-US" sz="1200" kern="1200" baseline="0">
-                <a:solidFill>
-                  <a:schemeClr val="tx1"/>
-                </a:solidFill>
-                <a:latin typeface="+mn-lt"/>
-                <a:ea typeface="+mn-ea"/>
-                <a:cs typeface="+mn-cs"/>
-              </a:rPr>
-              <a:t> field) and needs to override the </a:t>
-            </a:r>
-            <a:r>
-              <a:rPr lang="en-US" sz="1200" kern="1200" baseline="0" err="1">
-                <a:solidFill>
-                  <a:schemeClr val="tx1"/>
-                </a:solidFill>
-                <a:latin typeface="+mn-lt"/>
-                <a:ea typeface="+mn-ea"/>
-                <a:cs typeface="+mn-cs"/>
-              </a:rPr>
-              <a:t>checkAttack</a:t>
-            </a:r>
-            <a:r>
-              <a:rPr lang="en-US" sz="1200" kern="1200" baseline="0">
-                <a:solidFill>
-                  <a:schemeClr val="tx1"/>
-                </a:solidFill>
-                <a:latin typeface="+mn-lt"/>
-                <a:ea typeface="+mn-ea"/>
-                <a:cs typeface="+mn-cs"/>
-              </a:rPr>
-              <a:t> method which is not obvious without looking at more code than they usually have to look at for the rest of the classes.</a:t>
-            </a:r>
-            <a:endParaRPr lang="en-US" sz="1200" kern="1200">
-              <a:solidFill>
-                <a:schemeClr val="tx1"/>
-              </a:solidFill>
-              <a:latin typeface="+mn-lt"/>
-              <a:ea typeface="+mn-ea"/>
-              <a:cs typeface="+mn-cs"/>
-            </a:endParaRPr>
-          </a:p>
-          <a:p>
-            <a:endParaRPr lang="en-US" sz="1200" kern="1200">
-              <a:solidFill>
-                <a:schemeClr val="tx1"/>
-              </a:solidFill>
-              <a:latin typeface="+mn-lt"/>
-              <a:ea typeface="+mn-ea"/>
-              <a:cs typeface="+mn-cs"/>
-            </a:endParaRPr>
-          </a:p>
-          <a:p>
-            <a:r>
-              <a:rPr lang="en-US" sz="1200" kern="1200">
-                <a:solidFill>
-                  <a:schemeClr val="tx1"/>
-                </a:solidFill>
-                <a:latin typeface="+mn-lt"/>
-                <a:ea typeface="+mn-ea"/>
-                <a:cs typeface="+mn-cs"/>
-              </a:rPr>
-              <a:t>@Override </a:t>
-            </a:r>
-          </a:p>
-          <a:p>
-            <a:r>
-              <a:rPr lang="en-US" sz="1200" b="1" kern="1200">
-                <a:solidFill>
-                  <a:schemeClr val="tx1"/>
-                </a:solidFill>
-                <a:latin typeface="+mn-lt"/>
-                <a:ea typeface="+mn-ea"/>
-                <a:cs typeface="+mn-cs"/>
-              </a:rPr>
-              <a:t>public </a:t>
-            </a:r>
-            <a:r>
-              <a:rPr lang="en-US" sz="1200" b="1" kern="1200" err="1">
-                <a:solidFill>
-                  <a:schemeClr val="tx1"/>
-                </a:solidFill>
-                <a:latin typeface="+mn-lt"/>
-                <a:ea typeface="+mn-ea"/>
-                <a:cs typeface="+mn-cs"/>
-              </a:rPr>
-              <a:t>boolean</a:t>
-            </a:r>
-            <a:r>
-              <a:rPr lang="en-US" sz="1200" b="1" kern="1200">
-                <a:solidFill>
-                  <a:schemeClr val="tx1"/>
-                </a:solidFill>
-                <a:latin typeface="+mn-lt"/>
-                <a:ea typeface="+mn-ea"/>
-                <a:cs typeface="+mn-cs"/>
-              </a:rPr>
-              <a:t> </a:t>
-            </a:r>
-            <a:r>
-              <a:rPr lang="en-US" sz="1200" b="1" kern="1200" err="1">
-                <a:solidFill>
-                  <a:schemeClr val="tx1"/>
-                </a:solidFill>
-                <a:latin typeface="+mn-lt"/>
-                <a:ea typeface="+mn-ea"/>
-                <a:cs typeface="+mn-cs"/>
-              </a:rPr>
-              <a:t>checkAttack</a:t>
-            </a:r>
-            <a:r>
-              <a:rPr lang="en-US" sz="1200" b="1" kern="1200">
-                <a:solidFill>
-                  <a:schemeClr val="tx1"/>
-                </a:solidFill>
-                <a:latin typeface="+mn-lt"/>
-                <a:ea typeface="+mn-ea"/>
-                <a:cs typeface="+mn-cs"/>
-              </a:rPr>
-              <a:t>(</a:t>
-            </a:r>
-            <a:r>
-              <a:rPr lang="en-US" sz="1200" b="1" kern="1200" err="1">
-                <a:solidFill>
-                  <a:schemeClr val="tx1"/>
-                </a:solidFill>
-                <a:latin typeface="+mn-lt"/>
-                <a:ea typeface="+mn-ea"/>
-                <a:cs typeface="+mn-cs"/>
-              </a:rPr>
-              <a:t>int</a:t>
-            </a:r>
-            <a:r>
-              <a:rPr lang="en-US" sz="1200" b="1" kern="1200">
-                <a:solidFill>
-                  <a:schemeClr val="tx1"/>
-                </a:solidFill>
-                <a:latin typeface="+mn-lt"/>
-                <a:ea typeface="+mn-ea"/>
-                <a:cs typeface="+mn-cs"/>
-              </a:rPr>
-              <a:t> dx, </a:t>
-            </a:r>
-            <a:r>
-              <a:rPr lang="en-US" sz="1200" b="1" kern="1200" err="1">
-                <a:solidFill>
-                  <a:schemeClr val="tx1"/>
-                </a:solidFill>
-                <a:latin typeface="+mn-lt"/>
-                <a:ea typeface="+mn-ea"/>
-                <a:cs typeface="+mn-cs"/>
-              </a:rPr>
-              <a:t>int</a:t>
-            </a:r>
-            <a:r>
-              <a:rPr lang="en-US" sz="1200" b="1" kern="1200">
-                <a:solidFill>
-                  <a:schemeClr val="tx1"/>
-                </a:solidFill>
-                <a:latin typeface="+mn-lt"/>
-                <a:ea typeface="+mn-ea"/>
-                <a:cs typeface="+mn-cs"/>
-              </a:rPr>
-              <a:t> </a:t>
-            </a:r>
-            <a:r>
-              <a:rPr lang="en-US" sz="1200" b="1" kern="1200" err="1">
-                <a:solidFill>
-                  <a:schemeClr val="tx1"/>
-                </a:solidFill>
-                <a:latin typeface="+mn-lt"/>
-                <a:ea typeface="+mn-ea"/>
-                <a:cs typeface="+mn-cs"/>
-              </a:rPr>
-              <a:t>dy</a:t>
-            </a:r>
-            <a:r>
-              <a:rPr lang="en-US" sz="1200" b="1" kern="1200">
-                <a:solidFill>
-                  <a:schemeClr val="tx1"/>
-                </a:solidFill>
-                <a:latin typeface="+mn-lt"/>
-                <a:ea typeface="+mn-ea"/>
-                <a:cs typeface="+mn-cs"/>
-              </a:rPr>
-              <a:t>, </a:t>
-            </a:r>
-            <a:r>
-              <a:rPr lang="en-US" sz="1200" b="1" kern="1200" err="1">
-                <a:solidFill>
-                  <a:schemeClr val="tx1"/>
-                </a:solidFill>
-                <a:latin typeface="+mn-lt"/>
-                <a:ea typeface="+mn-ea"/>
-                <a:cs typeface="+mn-cs"/>
-              </a:rPr>
-              <a:t>ChessPiece</a:t>
-            </a:r>
-            <a:r>
-              <a:rPr lang="en-US" sz="1200" b="1" kern="1200">
-                <a:solidFill>
-                  <a:schemeClr val="tx1"/>
-                </a:solidFill>
-                <a:latin typeface="+mn-lt"/>
-                <a:ea typeface="+mn-ea"/>
-                <a:cs typeface="+mn-cs"/>
-              </a:rPr>
-              <a:t> piece) {</a:t>
-            </a:r>
-          </a:p>
-          <a:p>
-            <a:r>
-              <a:rPr lang="en-US" sz="1200" b="1" kern="1200">
-                <a:solidFill>
-                  <a:schemeClr val="tx1"/>
-                </a:solidFill>
-                <a:latin typeface="+mn-lt"/>
-                <a:ea typeface="+mn-ea"/>
-                <a:cs typeface="+mn-cs"/>
-              </a:rPr>
-              <a:t>if (</a:t>
-            </a:r>
-            <a:r>
-              <a:rPr lang="en-US" sz="1200" b="1" kern="1200" err="1">
-                <a:solidFill>
-                  <a:schemeClr val="tx1"/>
-                </a:solidFill>
-                <a:latin typeface="+mn-lt"/>
-                <a:ea typeface="+mn-ea"/>
-                <a:cs typeface="+mn-cs"/>
-              </a:rPr>
-              <a:t>this.isWhite</a:t>
-            </a:r>
-            <a:r>
-              <a:rPr lang="en-US" sz="1200" b="1" kern="1200">
-                <a:solidFill>
-                  <a:schemeClr val="tx1"/>
-                </a:solidFill>
-                <a:latin typeface="+mn-lt"/>
-                <a:ea typeface="+mn-ea"/>
-                <a:cs typeface="+mn-cs"/>
-              </a:rPr>
-              <a:t>() == </a:t>
-            </a:r>
-            <a:r>
-              <a:rPr lang="en-US" sz="1200" b="1" kern="1200" err="1">
-                <a:solidFill>
-                  <a:schemeClr val="tx1"/>
-                </a:solidFill>
-                <a:latin typeface="+mn-lt"/>
-                <a:ea typeface="+mn-ea"/>
-                <a:cs typeface="+mn-cs"/>
-              </a:rPr>
-              <a:t>piece.isWhite</a:t>
-            </a:r>
-            <a:r>
-              <a:rPr lang="en-US" sz="1200" b="1" kern="1200">
-                <a:solidFill>
-                  <a:schemeClr val="tx1"/>
-                </a:solidFill>
-                <a:latin typeface="+mn-lt"/>
-                <a:ea typeface="+mn-ea"/>
-                <a:cs typeface="+mn-cs"/>
-              </a:rPr>
-              <a:t>()) {</a:t>
-            </a:r>
-          </a:p>
-          <a:p>
-            <a:r>
-              <a:rPr lang="en-US" sz="1200" b="1" kern="1200">
-                <a:solidFill>
-                  <a:schemeClr val="tx1"/>
-                </a:solidFill>
-                <a:latin typeface="+mn-lt"/>
-                <a:ea typeface="+mn-ea"/>
-                <a:cs typeface="+mn-cs"/>
-              </a:rPr>
-              <a:t>return false;</a:t>
-            </a:r>
-          </a:p>
-          <a:p>
-            <a:r>
-              <a:rPr lang="en-US" sz="1200" kern="1200">
-                <a:solidFill>
-                  <a:schemeClr val="tx1"/>
-                </a:solidFill>
-                <a:latin typeface="+mn-lt"/>
-                <a:ea typeface="+mn-ea"/>
-                <a:cs typeface="+mn-cs"/>
-              </a:rPr>
-              <a:t>}</a:t>
-            </a:r>
-          </a:p>
-          <a:p>
-            <a:r>
-              <a:rPr lang="en-US" sz="1200" b="1" kern="1200">
-                <a:solidFill>
-                  <a:schemeClr val="tx1"/>
-                </a:solidFill>
-                <a:latin typeface="+mn-lt"/>
-                <a:ea typeface="+mn-ea"/>
-                <a:cs typeface="+mn-cs"/>
-              </a:rPr>
-              <a:t>if (!</a:t>
-            </a:r>
-            <a:r>
-              <a:rPr lang="en-US" sz="1200" b="1" kern="1200" err="1">
-                <a:solidFill>
-                  <a:schemeClr val="tx1"/>
-                </a:solidFill>
-                <a:latin typeface="+mn-lt"/>
-                <a:ea typeface="+mn-ea"/>
-                <a:cs typeface="+mn-cs"/>
-              </a:rPr>
-              <a:t>movedCorrectDirection</a:t>
-            </a:r>
-            <a:r>
-              <a:rPr lang="en-US" sz="1200" b="1" kern="1200">
-                <a:solidFill>
-                  <a:schemeClr val="tx1"/>
-                </a:solidFill>
-                <a:latin typeface="+mn-lt"/>
-                <a:ea typeface="+mn-ea"/>
-                <a:cs typeface="+mn-cs"/>
-              </a:rPr>
-              <a:t>(</a:t>
-            </a:r>
-            <a:r>
-              <a:rPr lang="en-US" sz="1200" b="1" kern="1200" err="1">
-                <a:solidFill>
-                  <a:schemeClr val="tx1"/>
-                </a:solidFill>
-                <a:latin typeface="+mn-lt"/>
-                <a:ea typeface="+mn-ea"/>
-                <a:cs typeface="+mn-cs"/>
-              </a:rPr>
-              <a:t>dy</a:t>
-            </a:r>
-            <a:r>
-              <a:rPr lang="en-US" sz="1200" b="1" kern="1200">
-                <a:solidFill>
-                  <a:schemeClr val="tx1"/>
-                </a:solidFill>
-                <a:latin typeface="+mn-lt"/>
-                <a:ea typeface="+mn-ea"/>
-                <a:cs typeface="+mn-cs"/>
-              </a:rPr>
-              <a:t>)) {</a:t>
-            </a:r>
-          </a:p>
-          <a:p>
-            <a:r>
-              <a:rPr lang="en-US" sz="1200" b="1" kern="1200">
-                <a:solidFill>
-                  <a:schemeClr val="tx1"/>
-                </a:solidFill>
-                <a:latin typeface="+mn-lt"/>
-                <a:ea typeface="+mn-ea"/>
-                <a:cs typeface="+mn-cs"/>
-              </a:rPr>
-              <a:t>return false;</a:t>
-            </a:r>
-          </a:p>
-          <a:p>
-            <a:r>
-              <a:rPr lang="en-US" sz="1200" kern="1200">
-                <a:solidFill>
-                  <a:schemeClr val="tx1"/>
-                </a:solidFill>
-                <a:latin typeface="+mn-lt"/>
-                <a:ea typeface="+mn-ea"/>
-                <a:cs typeface="+mn-cs"/>
-              </a:rPr>
-              <a:t>}</a:t>
-            </a:r>
-          </a:p>
-          <a:p>
-            <a:r>
-              <a:rPr lang="en-US" sz="1200" kern="1200">
-                <a:solidFill>
-                  <a:schemeClr val="tx1"/>
-                </a:solidFill>
-                <a:latin typeface="+mn-lt"/>
-                <a:ea typeface="+mn-ea"/>
-                <a:cs typeface="+mn-cs"/>
-              </a:rPr>
-              <a:t>dx = </a:t>
-            </a:r>
-            <a:r>
-              <a:rPr lang="en-US" sz="1200" kern="1200" err="1">
-                <a:solidFill>
-                  <a:schemeClr val="tx1"/>
-                </a:solidFill>
-                <a:latin typeface="+mn-lt"/>
-                <a:ea typeface="+mn-ea"/>
-                <a:cs typeface="+mn-cs"/>
-              </a:rPr>
-              <a:t>Math.abs</a:t>
-            </a:r>
-            <a:r>
-              <a:rPr lang="en-US" sz="1200" kern="1200">
-                <a:solidFill>
-                  <a:schemeClr val="tx1"/>
-                </a:solidFill>
-                <a:latin typeface="+mn-lt"/>
-                <a:ea typeface="+mn-ea"/>
-                <a:cs typeface="+mn-cs"/>
-              </a:rPr>
-              <a:t>(dx);</a:t>
-            </a:r>
-          </a:p>
-          <a:p>
-            <a:r>
-              <a:rPr lang="en-US" sz="1200" kern="1200" err="1">
-                <a:solidFill>
-                  <a:schemeClr val="tx1"/>
-                </a:solidFill>
-                <a:latin typeface="+mn-lt"/>
-                <a:ea typeface="+mn-ea"/>
-                <a:cs typeface="+mn-cs"/>
-              </a:rPr>
-              <a:t>dy</a:t>
-            </a:r>
-            <a:r>
-              <a:rPr lang="en-US" sz="1200" kern="1200">
-                <a:solidFill>
-                  <a:schemeClr val="tx1"/>
-                </a:solidFill>
-                <a:latin typeface="+mn-lt"/>
-                <a:ea typeface="+mn-ea"/>
-                <a:cs typeface="+mn-cs"/>
-              </a:rPr>
-              <a:t> = </a:t>
-            </a:r>
-            <a:r>
-              <a:rPr lang="en-US" sz="1200" kern="1200" err="1">
-                <a:solidFill>
-                  <a:schemeClr val="tx1"/>
-                </a:solidFill>
-                <a:latin typeface="+mn-lt"/>
-                <a:ea typeface="+mn-ea"/>
-                <a:cs typeface="+mn-cs"/>
-              </a:rPr>
-              <a:t>Math.abs</a:t>
-            </a:r>
-            <a:r>
-              <a:rPr lang="en-US" sz="1200" kern="1200">
-                <a:solidFill>
-                  <a:schemeClr val="tx1"/>
-                </a:solidFill>
-                <a:latin typeface="+mn-lt"/>
-                <a:ea typeface="+mn-ea"/>
-                <a:cs typeface="+mn-cs"/>
-              </a:rPr>
-              <a:t>(</a:t>
-            </a:r>
-            <a:r>
-              <a:rPr lang="en-US" sz="1200" kern="1200" err="1">
-                <a:solidFill>
-                  <a:schemeClr val="tx1"/>
-                </a:solidFill>
-                <a:latin typeface="+mn-lt"/>
-                <a:ea typeface="+mn-ea"/>
-                <a:cs typeface="+mn-cs"/>
-              </a:rPr>
-              <a:t>dy</a:t>
-            </a:r>
-            <a:r>
-              <a:rPr lang="en-US" sz="1200" kern="1200">
-                <a:solidFill>
-                  <a:schemeClr val="tx1"/>
-                </a:solidFill>
-                <a:latin typeface="+mn-lt"/>
-                <a:ea typeface="+mn-ea"/>
-                <a:cs typeface="+mn-cs"/>
-              </a:rPr>
-              <a:t>);</a:t>
-            </a:r>
-          </a:p>
-          <a:p>
-            <a:r>
-              <a:rPr lang="en-US" sz="1200" b="1" kern="1200">
-                <a:solidFill>
-                  <a:schemeClr val="tx1"/>
-                </a:solidFill>
-                <a:latin typeface="+mn-lt"/>
-                <a:ea typeface="+mn-ea"/>
-                <a:cs typeface="+mn-cs"/>
-              </a:rPr>
-              <a:t>return dx == 1 &amp;&amp; </a:t>
-            </a:r>
-            <a:r>
-              <a:rPr lang="en-US" sz="1200" b="1" kern="1200" err="1">
-                <a:solidFill>
-                  <a:schemeClr val="tx1"/>
-                </a:solidFill>
-                <a:latin typeface="+mn-lt"/>
-                <a:ea typeface="+mn-ea"/>
-                <a:cs typeface="+mn-cs"/>
-              </a:rPr>
-              <a:t>dy</a:t>
-            </a:r>
-            <a:r>
-              <a:rPr lang="en-US" sz="1200" b="1" kern="1200">
-                <a:solidFill>
-                  <a:schemeClr val="tx1"/>
-                </a:solidFill>
-                <a:latin typeface="+mn-lt"/>
-                <a:ea typeface="+mn-ea"/>
-                <a:cs typeface="+mn-cs"/>
-              </a:rPr>
-              <a:t> == 1;</a:t>
-            </a:r>
-          </a:p>
-          <a:p>
-            <a:r>
-              <a:rPr lang="en-US" sz="1200" kern="1200">
-                <a:solidFill>
-                  <a:schemeClr val="tx1"/>
-                </a:solidFill>
-                <a:latin typeface="+mn-lt"/>
-                <a:ea typeface="+mn-ea"/>
-                <a:cs typeface="+mn-cs"/>
-              </a:rPr>
-              <a:t>}</a:t>
-            </a:r>
-            <a:endParaRPr lang="en-US"/>
-          </a:p>
-        </p:txBody>
-      </p:sp>
-      <p:sp>
-        <p:nvSpPr>
-          <p:cNvPr id="4" name="Slide Number Placeholder 3"/>
-          <p:cNvSpPr>
-            <a:spLocks noGrp="1"/>
-          </p:cNvSpPr>
-          <p:nvPr>
-            <p:ph type="sldNum" sz="quarter" idx="10"/>
-          </p:nvPr>
-        </p:nvSpPr>
-        <p:spPr/>
-        <p:txBody>
-          <a:bodyPr/>
-          <a:lstStyle/>
-          <a:p>
-            <a:pPr>
-              <a:defRPr/>
-            </a:pPr>
-            <a:fld id="{3A187583-0EC9-4694-9EAD-0DA64A27677E}" type="slidenum">
-              <a:rPr lang="en-US" smtClean="0"/>
-              <a:pPr>
-                <a:defRPr/>
-              </a:pPr>
-              <a:t>21</a:t>
-            </a:fld>
-            <a:endParaRPr lang="en-US"/>
-          </a:p>
-        </p:txBody>
-      </p:sp>
-    </p:spTree>
-    <p:extLst>
-      <p:ext uri="{BB962C8B-B14F-4D97-AF65-F5344CB8AC3E}">
-        <p14:creationId xmlns:p14="http://schemas.microsoft.com/office/powerpoint/2010/main" val="4079852235"/>
-      </p:ext>
-    </p:extLst>
-  </p:cSld>
-  <p:clrMapOvr>
-    <a:masterClrMapping/>
-  </p:clrMapOvr>
-</p:notes>
-</file>
-
-<file path=ppt/notesSlides/notesSlide22.xml><?xml version="1.0" encoding="utf-8"?>
-<p:notes xmlns:a="http://schemas.openxmlformats.org/drawingml/2006/main" xmlns:r="http://schemas.openxmlformats.org/officeDocument/2006/relationships" xmlns:p="http://schemas.openxmlformats.org/presentationml/2006/main">
-  <p:cSld>
-    <p:spTree>
-      <p:nvGrpSpPr>
-        <p:cNvPr id="1" name=""/>
-        <p:cNvGrpSpPr/>
-        <p:nvPr/>
-      </p:nvGrpSpPr>
-      <p:grpSpPr>
-        <a:xfrm>
-          <a:off x="0" y="0"/>
-          <a:ext cx="0" cy="0"/>
-          <a:chOff x="0" y="0"/>
-          <a:chExt cx="0" cy="0"/>
-        </a:xfrm>
-      </p:grpSpPr>
-      <p:sp>
-        <p:nvSpPr>
-          <p:cNvPr id="2" name="Slide Image Placeholder 1"/>
-          <p:cNvSpPr>
-            <a:spLocks noGrp="1" noRot="1" noChangeAspect="1"/>
-          </p:cNvSpPr>
-          <p:nvPr>
-            <p:ph type="sldImg"/>
-          </p:nvPr>
-        </p:nvSpPr>
-        <p:spPr/>
-      </p:sp>
-      <p:sp>
-        <p:nvSpPr>
-          <p:cNvPr id="3" name="Notes Placeholder 2"/>
-          <p:cNvSpPr>
-            <a:spLocks noGrp="1"/>
-          </p:cNvSpPr>
-          <p:nvPr>
-            <p:ph type="body" idx="1"/>
-          </p:nvPr>
-        </p:nvSpPr>
-        <p:spPr/>
-        <p:txBody>
-          <a:bodyPr/>
-          <a:lstStyle/>
-          <a:p>
-            <a:r>
-              <a:rPr lang="en-US" dirty="0"/>
-              <a:t>Consider showing working version of the solution in the private repo or playing part of the final functionality video:</a:t>
-            </a:r>
-          </a:p>
-          <a:p>
-            <a:endParaRPr lang="en-US" dirty="0"/>
-          </a:p>
-          <a:p>
-            <a:r>
-              <a:rPr lang="en-US" dirty="0"/>
-              <a:t>https://rose-hulman.hosted.panopto.com/Panopto/Pages/Viewer.aspx?id=c6958003-1803-436a-bc65-aba6002fdeb3</a:t>
-            </a:r>
-          </a:p>
-          <a:p>
-            <a:endParaRPr lang="en-US" dirty="0"/>
-          </a:p>
-          <a:p>
-            <a:endParaRPr lang="en-US" dirty="0"/>
-          </a:p>
-        </p:txBody>
-      </p:sp>
-      <p:sp>
-        <p:nvSpPr>
-          <p:cNvPr id="4" name="Slide Number Placeholder 3"/>
-          <p:cNvSpPr>
-            <a:spLocks noGrp="1"/>
-          </p:cNvSpPr>
-          <p:nvPr>
-            <p:ph type="sldNum" sz="quarter" idx="5"/>
-          </p:nvPr>
-        </p:nvSpPr>
-        <p:spPr/>
-        <p:txBody>
-          <a:bodyPr/>
-          <a:lstStyle/>
-          <a:p>
-            <a:pPr>
-              <a:defRPr/>
-            </a:pPr>
-            <a:fld id="{3A187583-0EC9-4694-9EAD-0DA64A27677E}" type="slidenum">
-              <a:rPr lang="en-US" smtClean="0"/>
-              <a:pPr>
-                <a:defRPr/>
-              </a:pPr>
-              <a:t>22</a:t>
-            </a:fld>
-            <a:endParaRPr lang="en-US"/>
-          </a:p>
-        </p:txBody>
-      </p:sp>
-    </p:spTree>
-    <p:extLst>
-      <p:ext uri="{BB962C8B-B14F-4D97-AF65-F5344CB8AC3E}">
-        <p14:creationId xmlns:p14="http://schemas.microsoft.com/office/powerpoint/2010/main" val="418949612"/>
-      </p:ext>
-    </p:extLst>
-  </p:cSld>
-  <p:clrMapOvr>
-    <a:masterClrMapping/>
-  </p:clrMapOvr>
-</p:notes>
-</file>
-
-<file path=ppt/notesSlides/notesSlide23.xml><?xml version="1.0" encoding="utf-8"?>
-<p:notes xmlns:a="http://schemas.openxmlformats.org/drawingml/2006/main" xmlns:r="http://schemas.openxmlformats.org/officeDocument/2006/relationships" xmlns:p="http://schemas.openxmlformats.org/presentationml/2006/main">
-  <p:cSld>
-    <p:spTree>
-      <p:nvGrpSpPr>
-        <p:cNvPr id="1" name=""/>
-        <p:cNvGrpSpPr/>
-        <p:nvPr/>
-      </p:nvGrpSpPr>
-      <p:grpSpPr>
-        <a:xfrm>
-          <a:off x="0" y="0"/>
-          <a:ext cx="0" cy="0"/>
-          <a:chOff x="0" y="0"/>
-          <a:chExt cx="0" cy="0"/>
-        </a:xfrm>
-      </p:grpSpPr>
-      <p:sp>
-        <p:nvSpPr>
-          <p:cNvPr id="2" name="Slide Image Placeholder 1"/>
-          <p:cNvSpPr>
-            <a:spLocks noGrp="1" noRot="1" noChangeAspect="1"/>
-          </p:cNvSpPr>
-          <p:nvPr>
-            <p:ph type="sldImg"/>
-          </p:nvPr>
-        </p:nvSpPr>
-        <p:spPr/>
-      </p:sp>
-      <p:sp>
-        <p:nvSpPr>
-          <p:cNvPr id="3" name="Notes Placeholder 2"/>
-          <p:cNvSpPr>
-            <a:spLocks noGrp="1"/>
-          </p:cNvSpPr>
-          <p:nvPr>
-            <p:ph type="body" idx="1"/>
-          </p:nvPr>
-        </p:nvSpPr>
-        <p:spPr/>
-        <p:txBody>
-          <a:bodyPr>
-            <a:normAutofit/>
-          </a:bodyPr>
-          <a:lstStyle/>
-          <a:p>
-            <a:endParaRPr lang="en-US"/>
-          </a:p>
-        </p:txBody>
-      </p:sp>
-      <p:sp>
-        <p:nvSpPr>
-          <p:cNvPr id="4" name="Slide Number Placeholder 3"/>
-          <p:cNvSpPr>
-            <a:spLocks noGrp="1"/>
-          </p:cNvSpPr>
-          <p:nvPr>
-            <p:ph type="sldNum" sz="quarter" idx="10"/>
-          </p:nvPr>
-        </p:nvSpPr>
-        <p:spPr/>
-        <p:txBody>
-          <a:bodyPr/>
-          <a:lstStyle/>
-          <a:p>
-            <a:pPr>
-              <a:defRPr/>
-            </a:pPr>
-            <a:fld id="{3A187583-0EC9-4694-9EAD-0DA64A27677E}" type="slidenum">
-              <a:rPr lang="en-US" smtClean="0"/>
-              <a:pPr>
-                <a:defRPr/>
-              </a:pPr>
-              <a:t>23</a:t>
-            </a:fld>
-            <a:endParaRPr lang="en-US"/>
-          </a:p>
-        </p:txBody>
-      </p:sp>
-    </p:spTree>
-    <p:extLst>
-      <p:ext uri="{BB962C8B-B14F-4D97-AF65-F5344CB8AC3E}">
-        <p14:creationId xmlns:p14="http://schemas.microsoft.com/office/powerpoint/2010/main" val="254997008"/>
       </p:ext>
     </p:extLst>
   </p:cSld>
@@ -11410,120 +10274,6 @@
 </p:sld>
 </file>
 
-<file path=ppt/slides/slide19.xml><?xml version="1.0" encoding="utf-8"?>
-<p:sld xmlns:a="http://schemas.openxmlformats.org/drawingml/2006/main" xmlns:r="http://schemas.openxmlformats.org/officeDocument/2006/relationships" xmlns:p="http://schemas.openxmlformats.org/presentationml/2006/main">
-  <p:cSld>
-    <p:spTree>
-      <p:nvGrpSpPr>
-        <p:cNvPr id="1" name=""/>
-        <p:cNvGrpSpPr/>
-        <p:nvPr/>
-      </p:nvGrpSpPr>
-      <p:grpSpPr>
-        <a:xfrm>
-          <a:off x="0" y="0"/>
-          <a:ext cx="0" cy="0"/>
-          <a:chOff x="0" y="0"/>
-          <a:chExt cx="0" cy="0"/>
-        </a:xfrm>
-      </p:grpSpPr>
-      <p:sp>
-        <p:nvSpPr>
-          <p:cNvPr id="2" name="Title 1"/>
-          <p:cNvSpPr>
-            <a:spLocks noGrp="1"/>
-          </p:cNvSpPr>
-          <p:nvPr>
-            <p:ph type="title"/>
-          </p:nvPr>
-        </p:nvSpPr>
-        <p:spPr/>
-        <p:txBody>
-          <a:bodyPr/>
-          <a:lstStyle/>
-          <a:p>
-            <a:r>
-              <a:rPr lang="en-US"/>
-              <a:t>Live coding</a:t>
-            </a:r>
-          </a:p>
-        </p:txBody>
-      </p:sp>
-      <p:sp>
-        <p:nvSpPr>
-          <p:cNvPr id="3" name="Content Placeholder 2"/>
-          <p:cNvSpPr>
-            <a:spLocks noGrp="1"/>
-          </p:cNvSpPr>
-          <p:nvPr>
-            <p:ph idx="1"/>
-          </p:nvPr>
-        </p:nvSpPr>
-        <p:spPr/>
-        <p:txBody>
-          <a:bodyPr/>
-          <a:lstStyle/>
-          <a:p>
-            <a:r>
-              <a:rPr lang="en-US"/>
-              <a:t>Let’s look at </a:t>
-            </a:r>
-            <a:r>
-              <a:rPr lang="en-US" err="1"/>
-              <a:t>chessPieces</a:t>
-            </a:r>
-            <a:r>
-              <a:rPr lang="en-US"/>
-              <a:t>/</a:t>
-            </a:r>
-            <a:r>
-              <a:rPr lang="en-US" err="1"/>
-              <a:t>chessSupport</a:t>
-            </a:r>
-            <a:endParaRPr lang="en-US"/>
-          </a:p>
-          <a:p>
-            <a:pPr lvl="1"/>
-            <a:r>
-              <a:rPr lang="en-US"/>
-              <a:t>Let’s Look at King and </a:t>
-            </a:r>
-            <a:r>
-              <a:rPr lang="en-US" err="1"/>
-              <a:t>ChessPiece</a:t>
-            </a:r>
-            <a:endParaRPr lang="en-US"/>
-          </a:p>
-          <a:p>
-            <a:pPr lvl="1"/>
-            <a:r>
-              <a:rPr lang="en-US" err="1"/>
-              <a:t>StandardBoardProvider</a:t>
-            </a:r>
-            <a:r>
-              <a:rPr lang="en-US"/>
-              <a:t> (uncomment King lines)</a:t>
-            </a:r>
-          </a:p>
-          <a:p>
-            <a:pPr lvl="1"/>
-            <a:endParaRPr lang="en-US"/>
-          </a:p>
-        </p:txBody>
-      </p:sp>
-    </p:spTree>
-    <p:extLst>
-      <p:ext uri="{BB962C8B-B14F-4D97-AF65-F5344CB8AC3E}">
-        <p14:creationId xmlns:p14="http://schemas.microsoft.com/office/powerpoint/2010/main" val="2864090242"/>
-      </p:ext>
-    </p:extLst>
-  </p:cSld>
-  <p:clrMapOvr>
-    <a:masterClrMapping/>
-  </p:clrMapOvr>
-</p:sld>
-</file>
-
 <file path=ppt/slides/slide2.xml><?xml version="1.0" encoding="utf-8"?>
 <p:sld xmlns:a="http://schemas.openxmlformats.org/drawingml/2006/main" xmlns:r="http://schemas.openxmlformats.org/officeDocument/2006/relationships" xmlns:p="http://schemas.openxmlformats.org/presentationml/2006/main">
   <p:cSld>
@@ -11745,893 +10495,6 @@
         </p:txBody>
       </p:sp>
     </p:spTree>
-  </p:cSld>
-  <p:clrMapOvr>
-    <a:masterClrMapping/>
-  </p:clrMapOvr>
-</p:sld>
-</file>
-
-<file path=ppt/slides/slide20.xml><?xml version="1.0" encoding="utf-8"?>
-<p:sld xmlns:a="http://schemas.openxmlformats.org/drawingml/2006/main" xmlns:r="http://schemas.openxmlformats.org/officeDocument/2006/relationships" xmlns:p="http://schemas.openxmlformats.org/presentationml/2006/main">
-  <p:cSld>
-    <p:spTree>
-      <p:nvGrpSpPr>
-        <p:cNvPr id="1" name=""/>
-        <p:cNvGrpSpPr/>
-        <p:nvPr/>
-      </p:nvGrpSpPr>
-      <p:grpSpPr>
-        <a:xfrm>
-          <a:off x="0" y="0"/>
-          <a:ext cx="0" cy="0"/>
-          <a:chOff x="0" y="0"/>
-          <a:chExt cx="0" cy="0"/>
-        </a:xfrm>
-      </p:grpSpPr>
-      <p:sp>
-        <p:nvSpPr>
-          <p:cNvPr id="3" name="Title 2"/>
-          <p:cNvSpPr>
-            <a:spLocks noGrp="1"/>
-          </p:cNvSpPr>
-          <p:nvPr>
-            <p:ph type="title"/>
-          </p:nvPr>
-        </p:nvSpPr>
-        <p:spPr/>
-        <p:txBody>
-          <a:bodyPr/>
-          <a:lstStyle/>
-          <a:p>
-            <a:pPr>
-              <a:defRPr/>
-            </a:pPr>
-            <a:r>
-              <a:rPr lang="en-US">
-                <a:solidFill>
-                  <a:schemeClr val="accent3"/>
-                </a:solidFill>
-              </a:rPr>
-              <a:t>Abstract</a:t>
-            </a:r>
-            <a:r>
-              <a:rPr lang="en-US"/>
-              <a:t> Classes</a:t>
-            </a:r>
-          </a:p>
-        </p:txBody>
-      </p:sp>
-      <p:sp>
-        <p:nvSpPr>
-          <p:cNvPr id="2" name="Content Placeholder 1"/>
-          <p:cNvSpPr>
-            <a:spLocks noGrp="1"/>
-          </p:cNvSpPr>
-          <p:nvPr>
-            <p:ph idx="1"/>
-          </p:nvPr>
-        </p:nvSpPr>
-        <p:spPr/>
-        <p:txBody>
-          <a:bodyPr>
-            <a:normAutofit fontScale="85000" lnSpcReduction="10000"/>
-          </a:bodyPr>
-          <a:lstStyle/>
-          <a:p>
-            <a:pPr>
-              <a:defRPr/>
-            </a:pPr>
-            <a:r>
-              <a:rPr lang="en-US"/>
-              <a:t>Hybrid of </a:t>
-            </a:r>
-            <a:r>
-              <a:rPr lang="en-US" err="1"/>
-              <a:t>superclasses</a:t>
-            </a:r>
-            <a:r>
-              <a:rPr lang="en-US"/>
-              <a:t> and interfaces</a:t>
-            </a:r>
-          </a:p>
-          <a:p>
-            <a:pPr lvl="1">
-              <a:defRPr/>
-            </a:pPr>
-            <a:r>
-              <a:rPr lang="en-US"/>
-              <a:t>Like regular </a:t>
-            </a:r>
-            <a:r>
-              <a:rPr lang="en-US" err="1"/>
-              <a:t>superclasses</a:t>
-            </a:r>
-            <a:r>
-              <a:rPr lang="en-US"/>
-              <a:t>:</a:t>
-            </a:r>
-          </a:p>
-          <a:p>
-            <a:pPr lvl="2">
-              <a:defRPr/>
-            </a:pPr>
-            <a:r>
-              <a:rPr lang="en-US"/>
-              <a:t>Provide implementation of some methods</a:t>
-            </a:r>
-          </a:p>
-          <a:p>
-            <a:pPr lvl="1">
-              <a:defRPr/>
-            </a:pPr>
-            <a:r>
-              <a:rPr lang="en-US"/>
-              <a:t>Like interfaces</a:t>
-            </a:r>
-          </a:p>
-          <a:p>
-            <a:pPr lvl="2">
-              <a:defRPr/>
-            </a:pPr>
-            <a:r>
-              <a:rPr lang="en-US"/>
-              <a:t>Just provide signatures and docs of other methods</a:t>
-            </a:r>
-          </a:p>
-          <a:p>
-            <a:pPr lvl="2">
-              <a:defRPr/>
-            </a:pPr>
-            <a:r>
-              <a:rPr lang="en-US"/>
-              <a:t>Can’t be instantiated</a:t>
-            </a:r>
-          </a:p>
-          <a:p>
-            <a:pPr>
-              <a:defRPr/>
-            </a:pPr>
-            <a:r>
-              <a:rPr lang="en-US"/>
-              <a:t>Example:</a:t>
-            </a:r>
-          </a:p>
-          <a:p>
-            <a:pPr lvl="1">
-              <a:defRPr/>
-            </a:pPr>
-            <a:r>
-              <a:rPr lang="en-US" b="1">
-                <a:latin typeface="Lucida Sans Typewriter" pitchFamily="49" charset="0"/>
-              </a:rPr>
-              <a:t>public </a:t>
-            </a:r>
-            <a:r>
-              <a:rPr lang="en-US" b="1">
-                <a:solidFill>
-                  <a:schemeClr val="accent3"/>
-                </a:solidFill>
-                <a:latin typeface="Lucida Sans Typewriter" pitchFamily="49" charset="0"/>
-              </a:rPr>
-              <a:t>abstract</a:t>
-            </a:r>
-            <a:r>
-              <a:rPr lang="en-US" b="1">
-                <a:latin typeface="Lucida Sans Typewriter" pitchFamily="49" charset="0"/>
-              </a:rPr>
-              <a:t> class </a:t>
-            </a:r>
-            <a:r>
-              <a:rPr lang="en-US" b="1" err="1">
-                <a:latin typeface="Lucida Sans Typewriter" pitchFamily="49" charset="0"/>
-              </a:rPr>
-              <a:t>BankAccount</a:t>
-            </a:r>
-            <a:r>
-              <a:rPr lang="en-US" b="1">
-                <a:latin typeface="Lucida Sans Typewriter" pitchFamily="49" charset="0"/>
-              </a:rPr>
-              <a:t> {</a:t>
-            </a:r>
-            <a:br>
-              <a:rPr lang="en-US" b="1">
-                <a:latin typeface="Lucida Sans Typewriter" pitchFamily="49" charset="0"/>
-              </a:rPr>
-            </a:br>
-            <a:r>
-              <a:rPr lang="en-US" b="1">
-                <a:latin typeface="Lucida Sans Typewriter" pitchFamily="49" charset="0"/>
-              </a:rPr>
-              <a:t>    /** documentation here */</a:t>
-            </a:r>
-            <a:br>
-              <a:rPr lang="en-US" b="1">
-                <a:latin typeface="Lucida Sans Typewriter" pitchFamily="49" charset="0"/>
-              </a:rPr>
-            </a:br>
-            <a:r>
-              <a:rPr lang="en-US" b="1">
-                <a:latin typeface="Lucida Sans Typewriter" pitchFamily="49" charset="0"/>
-              </a:rPr>
-              <a:t>    public </a:t>
-            </a:r>
-            <a:r>
-              <a:rPr lang="en-US" b="1">
-                <a:solidFill>
-                  <a:schemeClr val="accent3"/>
-                </a:solidFill>
-                <a:latin typeface="Lucida Sans Typewriter" pitchFamily="49" charset="0"/>
-              </a:rPr>
-              <a:t>abstract</a:t>
-            </a:r>
-            <a:r>
-              <a:rPr lang="en-US" b="1">
-                <a:latin typeface="Lucida Sans Typewriter" pitchFamily="49" charset="0"/>
-              </a:rPr>
-              <a:t> void </a:t>
-            </a:r>
-            <a:r>
-              <a:rPr lang="en-US" b="1" err="1">
-                <a:latin typeface="Lucida Sans Typewriter" pitchFamily="49" charset="0"/>
-              </a:rPr>
-              <a:t>deductFees</a:t>
-            </a:r>
-            <a:r>
-              <a:rPr lang="en-US" b="1">
-                <a:latin typeface="Lucida Sans Typewriter" pitchFamily="49" charset="0"/>
-              </a:rPr>
-              <a:t>()</a:t>
-            </a:r>
-            <a:r>
-              <a:rPr lang="en-US" b="1">
-                <a:solidFill>
-                  <a:schemeClr val="accent3"/>
-                </a:solidFill>
-                <a:latin typeface="Lucida Sans Typewriter" pitchFamily="49" charset="0"/>
-              </a:rPr>
-              <a:t>;</a:t>
-            </a:r>
-            <a:br>
-              <a:rPr lang="en-US" b="1">
-                <a:latin typeface="Lucida Sans Typewriter" pitchFamily="49" charset="0"/>
-              </a:rPr>
-            </a:br>
-            <a:r>
-              <a:rPr lang="en-US" b="1">
-                <a:latin typeface="Lucida Sans Typewriter" pitchFamily="49" charset="0"/>
-              </a:rPr>
-              <a:t>    …</a:t>
-            </a:r>
-            <a:br>
-              <a:rPr lang="en-US" b="1">
-                <a:latin typeface="Lucida Sans Typewriter" pitchFamily="49" charset="0"/>
-              </a:rPr>
-            </a:br>
-            <a:r>
-              <a:rPr lang="en-US" b="1">
-                <a:latin typeface="Lucida Sans Typewriter" pitchFamily="49" charset="0"/>
-              </a:rPr>
-              <a:t>}</a:t>
-            </a:r>
-          </a:p>
-        </p:txBody>
-      </p:sp>
-      <p:sp>
-        <p:nvSpPr>
-          <p:cNvPr id="4" name="Line Callout 2 3"/>
-          <p:cNvSpPr/>
-          <p:nvPr/>
-        </p:nvSpPr>
-        <p:spPr>
-          <a:xfrm>
-            <a:off x="3581400" y="6007100"/>
-            <a:ext cx="3429000" cy="622300"/>
-          </a:xfrm>
-          <a:prstGeom prst="borderCallout2">
-            <a:avLst>
-              <a:gd name="adj1" fmla="val 18750"/>
-              <a:gd name="adj2" fmla="val -8333"/>
-              <a:gd name="adj3" fmla="val 18750"/>
-              <a:gd name="adj4" fmla="val -16667"/>
-              <a:gd name="adj5" fmla="val -51872"/>
-              <a:gd name="adj6" fmla="val -44407"/>
-            </a:avLst>
-          </a:prstGeom>
-        </p:spPr>
-        <p:style>
-          <a:lnRef idx="2">
-            <a:schemeClr val="accent1">
-              <a:shade val="50000"/>
-            </a:schemeClr>
-          </a:lnRef>
-          <a:fillRef idx="1">
-            <a:schemeClr val="accent1"/>
-          </a:fillRef>
-          <a:effectRef idx="0">
-            <a:schemeClr val="accent1"/>
-          </a:effectRef>
-          <a:fontRef idx="minor">
-            <a:schemeClr val="lt1"/>
-          </a:fontRef>
-        </p:style>
-        <p:txBody>
-          <a:bodyPr anchor="ctr"/>
-          <a:lstStyle/>
-          <a:p>
-            <a:pPr algn="ctr">
-              <a:defRPr/>
-            </a:pPr>
-            <a:r>
-              <a:rPr lang="en-US"/>
-              <a:t>Elided methods as before</a:t>
-            </a:r>
-          </a:p>
-        </p:txBody>
-      </p:sp>
-      <p:sp>
-        <p:nvSpPr>
-          <p:cNvPr id="5" name="TextBox 4"/>
-          <p:cNvSpPr txBox="1"/>
-          <p:nvPr/>
-        </p:nvSpPr>
-        <p:spPr>
-          <a:xfrm>
-            <a:off x="7010400" y="152400"/>
-            <a:ext cx="2057400" cy="2800767"/>
-          </a:xfrm>
-          <a:prstGeom prst="rect">
-            <a:avLst/>
-          </a:prstGeom>
-        </p:spPr>
-        <p:style>
-          <a:lnRef idx="2">
-            <a:schemeClr val="accent3">
-              <a:shade val="50000"/>
-            </a:schemeClr>
-          </a:lnRef>
-          <a:fillRef idx="1">
-            <a:schemeClr val="accent3"/>
-          </a:fillRef>
-          <a:effectRef idx="0">
-            <a:schemeClr val="accent3"/>
-          </a:effectRef>
-          <a:fontRef idx="minor">
-            <a:schemeClr val="lt1"/>
-          </a:fontRef>
-        </p:style>
-        <p:txBody>
-          <a:bodyPr wrap="square">
-            <a:spAutoFit/>
-          </a:bodyPr>
-          <a:lstStyle/>
-          <a:p>
-            <a:pPr>
-              <a:defRPr/>
-            </a:pPr>
-            <a:r>
-              <a:rPr lang="en-US" sz="2200"/>
-              <a:t>Also look at the code in the shapes package, especially </a:t>
-            </a:r>
-            <a:r>
-              <a:rPr lang="en-US" sz="2200" err="1"/>
-              <a:t>ShapesDemo</a:t>
-            </a:r>
-            <a:r>
-              <a:rPr lang="en-US" sz="2200"/>
-              <a:t>  (during or after class)</a:t>
-            </a:r>
-          </a:p>
-        </p:txBody>
-      </p:sp>
-    </p:spTree>
-  </p:cSld>
-  <p:clrMapOvr>
-    <a:masterClrMapping/>
-  </p:clrMapOvr>
-</p:sld>
-</file>
-
-<file path=ppt/slides/slide21.xml><?xml version="1.0" encoding="utf-8"?>
-<p:sld xmlns:a="http://schemas.openxmlformats.org/drawingml/2006/main" xmlns:r="http://schemas.openxmlformats.org/officeDocument/2006/relationships" xmlns:p="http://schemas.openxmlformats.org/presentationml/2006/main">
-  <p:cSld>
-    <p:spTree>
-      <p:nvGrpSpPr>
-        <p:cNvPr id="1" name=""/>
-        <p:cNvGrpSpPr/>
-        <p:nvPr/>
-      </p:nvGrpSpPr>
-      <p:grpSpPr>
-        <a:xfrm>
-          <a:off x="0" y="0"/>
-          <a:ext cx="0" cy="0"/>
-          <a:chOff x="0" y="0"/>
-          <a:chExt cx="0" cy="0"/>
-        </a:xfrm>
-      </p:grpSpPr>
-      <p:pic>
-        <p:nvPicPr>
-          <p:cNvPr id="1026" name="Picture 2" descr="https://lh3.googleusercontent.com/-nCSw8aR4ICA/TYCGy3xrZPI/AAAAAAAAABI/CG0rejrXNR8/s1600/move.jpg"/>
-          <p:cNvPicPr>
-            <a:picLocks noChangeAspect="1" noChangeArrowheads="1"/>
-          </p:cNvPicPr>
-          <p:nvPr/>
-        </p:nvPicPr>
-        <p:blipFill>
-          <a:blip r:embed="rId3">
-            <a:extLst>
-              <a:ext uri="{28A0092B-C50C-407E-A947-70E740481C1C}">
-                <a14:useLocalDpi xmlns:a14="http://schemas.microsoft.com/office/drawing/2010/main" val="0"/>
-              </a:ext>
-            </a:extLst>
-          </a:blip>
-          <a:srcRect/>
-          <a:stretch>
-            <a:fillRect/>
-          </a:stretch>
-        </p:blipFill>
-        <p:spPr bwMode="auto">
-          <a:xfrm>
-            <a:off x="508984" y="304800"/>
-            <a:ext cx="8354632" cy="6350002"/>
-          </a:xfrm>
-          <a:prstGeom prst="rect">
-            <a:avLst/>
-          </a:prstGeom>
-          <a:noFill/>
-          <a:extLst>
-            <a:ext uri="{909E8E84-426E-40DD-AFC4-6F175D3DCCD1}">
-              <a14:hiddenFill xmlns:a14="http://schemas.microsoft.com/office/drawing/2010/main">
-                <a:solidFill>
-                  <a:srgbClr val="FFFFFF"/>
-                </a:solidFill>
-              </a14:hiddenFill>
-            </a:ext>
-          </a:extLst>
-        </p:spPr>
-      </p:pic>
-    </p:spTree>
-    <p:extLst>
-      <p:ext uri="{BB962C8B-B14F-4D97-AF65-F5344CB8AC3E}">
-        <p14:creationId xmlns:p14="http://schemas.microsoft.com/office/powerpoint/2010/main" val="1474679666"/>
-      </p:ext>
-    </p:extLst>
-  </p:cSld>
-  <p:clrMapOvr>
-    <a:masterClrMapping/>
-  </p:clrMapOvr>
-</p:sld>
-</file>
-
-<file path=ppt/slides/slide22.xml><?xml version="1.0" encoding="utf-8"?>
-<p:sld xmlns:a="http://schemas.openxmlformats.org/drawingml/2006/main" xmlns:r="http://schemas.openxmlformats.org/officeDocument/2006/relationships" xmlns:p="http://schemas.openxmlformats.org/presentationml/2006/main">
-  <p:cSld>
-    <p:spTree>
-      <p:nvGrpSpPr>
-        <p:cNvPr id="1" name=""/>
-        <p:cNvGrpSpPr/>
-        <p:nvPr/>
-      </p:nvGrpSpPr>
-      <p:grpSpPr>
-        <a:xfrm>
-          <a:off x="0" y="0"/>
-          <a:ext cx="0" cy="0"/>
-          <a:chOff x="0" y="0"/>
-          <a:chExt cx="0" cy="0"/>
-        </a:xfrm>
-      </p:grpSpPr>
-      <p:sp>
-        <p:nvSpPr>
-          <p:cNvPr id="2" name="Title 1">
-            <a:extLst>
-              <a:ext uri="{FF2B5EF4-FFF2-40B4-BE49-F238E27FC236}">
-                <a16:creationId xmlns:a16="http://schemas.microsoft.com/office/drawing/2014/main" id="{0FE5D7D7-B2C6-CA92-C52A-C39677C41C69}"/>
-              </a:ext>
-            </a:extLst>
-          </p:cNvPr>
-          <p:cNvSpPr>
-            <a:spLocks noGrp="1"/>
-          </p:cNvSpPr>
-          <p:nvPr>
-            <p:ph type="title"/>
-          </p:nvPr>
-        </p:nvSpPr>
-        <p:spPr/>
-        <p:txBody>
-          <a:bodyPr/>
-          <a:lstStyle/>
-          <a:p>
-            <a:r>
-              <a:rPr lang="en-US" dirty="0"/>
-              <a:t>Upcoming Homework</a:t>
-            </a:r>
-          </a:p>
-        </p:txBody>
-      </p:sp>
-      <p:sp>
-        <p:nvSpPr>
-          <p:cNvPr id="3" name="Content Placeholder 2">
-            <a:extLst>
-              <a:ext uri="{FF2B5EF4-FFF2-40B4-BE49-F238E27FC236}">
-                <a16:creationId xmlns:a16="http://schemas.microsoft.com/office/drawing/2014/main" id="{59607EB5-0DCE-F85D-2869-0FE09B932F1B}"/>
-              </a:ext>
-            </a:extLst>
-          </p:cNvPr>
-          <p:cNvSpPr>
-            <a:spLocks noGrp="1"/>
-          </p:cNvSpPr>
-          <p:nvPr>
-            <p:ph idx="1"/>
-          </p:nvPr>
-        </p:nvSpPr>
-        <p:spPr>
-          <a:xfrm>
-            <a:off x="457200" y="1600201"/>
-            <a:ext cx="8229600" cy="2286000"/>
-          </a:xfrm>
-        </p:spPr>
-        <p:txBody>
-          <a:bodyPr/>
-          <a:lstStyle/>
-          <a:p>
-            <a:r>
-              <a:rPr lang="en-US" dirty="0" err="1"/>
-              <a:t>RefactoringInheritance</a:t>
-            </a:r>
-            <a:endParaRPr lang="en-US" dirty="0"/>
-          </a:p>
-          <a:p>
-            <a:pPr lvl="1"/>
-            <a:r>
-              <a:rPr lang="en-US" dirty="0"/>
-              <a:t>Requires you to utilize inheritance</a:t>
-            </a:r>
-          </a:p>
-          <a:p>
-            <a:pPr lvl="1"/>
-            <a:r>
-              <a:rPr lang="en-US" dirty="0"/>
-              <a:t>Careful to avoid variable shadowing</a:t>
-            </a:r>
-          </a:p>
-          <a:p>
-            <a:pPr lvl="1"/>
-            <a:r>
-              <a:rPr lang="en-US" dirty="0"/>
-              <a:t>Read instructions carefully</a:t>
-            </a:r>
-          </a:p>
-        </p:txBody>
-      </p:sp>
-      <p:pic>
-        <p:nvPicPr>
-          <p:cNvPr id="5" name="Picture 4">
-            <a:extLst>
-              <a:ext uri="{FF2B5EF4-FFF2-40B4-BE49-F238E27FC236}">
-                <a16:creationId xmlns:a16="http://schemas.microsoft.com/office/drawing/2014/main" id="{0BD5A0DF-4E2C-82EC-5E5E-62D988B31CB7}"/>
-              </a:ext>
-            </a:extLst>
-          </p:cNvPr>
-          <p:cNvPicPr>
-            <a:picLocks noChangeAspect="1"/>
-          </p:cNvPicPr>
-          <p:nvPr/>
-        </p:nvPicPr>
-        <p:blipFill>
-          <a:blip r:embed="rId3"/>
-          <a:stretch>
-            <a:fillRect/>
-          </a:stretch>
-        </p:blipFill>
-        <p:spPr>
-          <a:xfrm>
-            <a:off x="457200" y="3747653"/>
-            <a:ext cx="7071360" cy="3020291"/>
-          </a:xfrm>
-          <a:prstGeom prst="rect">
-            <a:avLst/>
-          </a:prstGeom>
-        </p:spPr>
-      </p:pic>
-    </p:spTree>
-    <p:extLst>
-      <p:ext uri="{BB962C8B-B14F-4D97-AF65-F5344CB8AC3E}">
-        <p14:creationId xmlns:p14="http://schemas.microsoft.com/office/powerpoint/2010/main" val="2283330882"/>
-      </p:ext>
-    </p:extLst>
-  </p:cSld>
-  <p:clrMapOvr>
-    <a:masterClrMapping/>
-  </p:clrMapOvr>
-</p:sld>
-</file>
-
-<file path=ppt/slides/slide23.xml><?xml version="1.0" encoding="utf-8"?>
-<p:sld xmlns:a="http://schemas.openxmlformats.org/drawingml/2006/main" xmlns:r="http://schemas.openxmlformats.org/officeDocument/2006/relationships" xmlns:p="http://schemas.openxmlformats.org/presentationml/2006/main">
-  <p:cSld>
-    <p:spTree>
-      <p:nvGrpSpPr>
-        <p:cNvPr id="1" name=""/>
-        <p:cNvGrpSpPr/>
-        <p:nvPr/>
-      </p:nvGrpSpPr>
-      <p:grpSpPr>
-        <a:xfrm>
-          <a:off x="0" y="0"/>
-          <a:ext cx="0" cy="0"/>
-          <a:chOff x="0" y="0"/>
-          <a:chExt cx="0" cy="0"/>
-        </a:xfrm>
-      </p:grpSpPr>
-      <p:sp>
-        <p:nvSpPr>
-          <p:cNvPr id="4" name="Title 3"/>
-          <p:cNvSpPr>
-            <a:spLocks noGrp="1"/>
-          </p:cNvSpPr>
-          <p:nvPr>
-            <p:ph type="title"/>
-          </p:nvPr>
-        </p:nvSpPr>
-        <p:spPr/>
-        <p:txBody>
-          <a:bodyPr/>
-          <a:lstStyle/>
-          <a:p>
-            <a:pPr>
-              <a:defRPr/>
-            </a:pPr>
-            <a:r>
-              <a:rPr lang="en-US"/>
-              <a:t>Work Time</a:t>
-            </a:r>
-          </a:p>
-        </p:txBody>
-      </p:sp>
-      <p:sp>
-        <p:nvSpPr>
-          <p:cNvPr id="24579" name="Text Placeholder 4"/>
-          <p:cNvSpPr>
-            <a:spLocks noGrp="1"/>
-          </p:cNvSpPr>
-          <p:nvPr>
-            <p:ph type="body" idx="1"/>
-          </p:nvPr>
-        </p:nvSpPr>
-        <p:spPr>
-          <a:xfrm>
-            <a:off x="722313" y="1828801"/>
-            <a:ext cx="7772400" cy="2578100"/>
-          </a:xfrm>
-        </p:spPr>
-        <p:txBody>
-          <a:bodyPr>
-            <a:normAutofit/>
-          </a:bodyPr>
-          <a:lstStyle/>
-          <a:p>
-            <a:r>
-              <a:rPr lang="en-US"/>
-              <a:t>Chess</a:t>
-            </a:r>
-          </a:p>
-          <a:p>
-            <a:endParaRPr lang="en-US"/>
-          </a:p>
-          <a:p>
-            <a:endParaRPr lang="en-US"/>
-          </a:p>
-          <a:p>
-            <a:r>
-              <a:rPr lang="en-US"/>
-              <a:t>And to ask instructor/assistants for help</a:t>
-            </a:r>
-          </a:p>
-        </p:txBody>
-      </p:sp>
-      <p:sp>
-        <p:nvSpPr>
-          <p:cNvPr id="5" name="TextBox 4"/>
-          <p:cNvSpPr txBox="1"/>
-          <p:nvPr/>
-        </p:nvSpPr>
-        <p:spPr>
-          <a:xfrm>
-            <a:off x="7772400" y="6324600"/>
-            <a:ext cx="800219" cy="369332"/>
-          </a:xfrm>
-          <a:prstGeom prst="rect">
-            <a:avLst/>
-          </a:prstGeom>
-        </p:spPr>
-        <p:style>
-          <a:lnRef idx="2">
-            <a:schemeClr val="accent3">
-              <a:shade val="50000"/>
-            </a:schemeClr>
-          </a:lnRef>
-          <a:fillRef idx="1">
-            <a:schemeClr val="accent3"/>
-          </a:fillRef>
-          <a:effectRef idx="0">
-            <a:schemeClr val="accent3"/>
-          </a:effectRef>
-          <a:fontRef idx="minor">
-            <a:schemeClr val="lt1"/>
-          </a:fontRef>
-        </p:style>
-        <p:txBody>
-          <a:bodyPr wrap="none" rtlCol="0">
-            <a:spAutoFit/>
-          </a:bodyPr>
-          <a:lstStyle/>
-          <a:p>
-            <a:r>
-              <a:rPr lang="en-US"/>
-              <a:t>Q8-Q9</a:t>
-            </a:r>
-          </a:p>
-        </p:txBody>
-      </p:sp>
-    </p:spTree>
-  </p:cSld>
-  <p:clrMapOvr>
-    <a:masterClrMapping/>
-  </p:clrMapOvr>
-</p:sld>
-</file>
-
-<file path=ppt/slides/slide24.xml><?xml version="1.0" encoding="utf-8"?>
-<p:sld xmlns:a="http://schemas.openxmlformats.org/drawingml/2006/main" xmlns:r="http://schemas.openxmlformats.org/officeDocument/2006/relationships" xmlns:p="http://schemas.openxmlformats.org/presentationml/2006/main" show="0">
-  <p:cSld>
-    <p:spTree>
-      <p:nvGrpSpPr>
-        <p:cNvPr id="1" name=""/>
-        <p:cNvGrpSpPr/>
-        <p:nvPr/>
-      </p:nvGrpSpPr>
-      <p:grpSpPr>
-        <a:xfrm>
-          <a:off x="0" y="0"/>
-          <a:ext cx="0" cy="0"/>
-          <a:chOff x="0" y="0"/>
-          <a:chExt cx="0" cy="0"/>
-        </a:xfrm>
-      </p:grpSpPr>
-      <p:sp>
-        <p:nvSpPr>
-          <p:cNvPr id="2" name="Title 1"/>
-          <p:cNvSpPr>
-            <a:spLocks noGrp="1"/>
-          </p:cNvSpPr>
-          <p:nvPr>
-            <p:ph type="title"/>
-          </p:nvPr>
-        </p:nvSpPr>
-        <p:spPr/>
-        <p:txBody>
-          <a:bodyPr>
-            <a:normAutofit fontScale="90000"/>
-          </a:bodyPr>
-          <a:lstStyle/>
-          <a:p>
-            <a:r>
-              <a:rPr lang="en-US" dirty="0"/>
-              <a:t>If time allows:</a:t>
-            </a:r>
-            <a:br>
-              <a:rPr lang="en-US" dirty="0"/>
-            </a:br>
-            <a:r>
-              <a:rPr lang="en-US" dirty="0"/>
-              <a:t>Review of </a:t>
-            </a:r>
-            <a:r>
-              <a:rPr lang="en-US" dirty="0" err="1"/>
-              <a:t>BettingMain</a:t>
-            </a:r>
-            <a:r>
-              <a:rPr lang="en-US"/>
-              <a:t> Interface</a:t>
-            </a:r>
-            <a:endParaRPr lang="en-US" dirty="0"/>
-          </a:p>
-        </p:txBody>
-      </p:sp>
-      <p:pic>
-        <p:nvPicPr>
-          <p:cNvPr id="1026" name="Picture 2" descr="https://lh5.googleusercontent.com/vKRm2iF9VvcHXTnVzEvEgKtyjmLOG1GKyVtMwls6C8wLfYa_1LEeQMMn0_MpfL8NLdgWmCTPAFhxuroyh7Exb4ZrA3zh74kFEYp6Mp6pJW_vkdIeHTk9MGDLgZl0SDuH2Z1mM_dq">
-            <a:hlinkClick r:id="rId2"/>
-          </p:cNvPr>
-          <p:cNvPicPr>
-            <a:picLocks noGrp="1" noChangeAspect="1" noChangeArrowheads="1"/>
-          </p:cNvPicPr>
-          <p:nvPr>
-            <p:ph idx="1"/>
-          </p:nvPr>
-        </p:nvPicPr>
-        <p:blipFill>
-          <a:blip r:embed="rId3">
-            <a:extLst>
-              <a:ext uri="{28A0092B-C50C-407E-A947-70E740481C1C}">
-                <a14:useLocalDpi xmlns:a14="http://schemas.microsoft.com/office/drawing/2010/main" val="0"/>
-              </a:ext>
-            </a:extLst>
-          </a:blip>
-          <a:srcRect/>
-          <a:stretch>
-            <a:fillRect/>
-          </a:stretch>
-        </p:blipFill>
-        <p:spPr bwMode="auto">
-          <a:xfrm>
-            <a:off x="1825850" y="3485565"/>
-            <a:ext cx="5717949" cy="3103572"/>
-          </a:xfrm>
-          <a:prstGeom prst="rect">
-            <a:avLst/>
-          </a:prstGeom>
-          <a:noFill/>
-          <a:extLst>
-            <a:ext uri="{909E8E84-426E-40DD-AFC4-6F175D3DCCD1}">
-              <a14:hiddenFill xmlns:a14="http://schemas.microsoft.com/office/drawing/2010/main">
-                <a:solidFill>
-                  <a:srgbClr val="FFFFFF"/>
-                </a:solidFill>
-              </a14:hiddenFill>
-            </a:ext>
-          </a:extLst>
-        </p:spPr>
-      </p:pic>
-      <p:pic>
-        <p:nvPicPr>
-          <p:cNvPr id="1028" name="Picture 4" descr="https://lh4.googleusercontent.com/CrZ2wu3ZBZ7IeFOf4RM4FLifb955gTUKWqn-YSLtSWmC-2iu7W4e62tsXt7c_o1iip9WfGekBxQuYslNMZb0U3EEZ0wNYj69PXUlK_OUjaU1mgWzLbf92gFFZg7Nv4agh0XT7cMR">
-            <a:hlinkClick r:id="rId4"/>
-          </p:cNvPr>
-          <p:cNvPicPr>
-            <a:picLocks noChangeAspect="1" noChangeArrowheads="1"/>
-          </p:cNvPicPr>
-          <p:nvPr/>
-        </p:nvPicPr>
-        <p:blipFill>
-          <a:blip r:embed="rId5">
-            <a:extLst>
-              <a:ext uri="{28A0092B-C50C-407E-A947-70E740481C1C}">
-                <a14:useLocalDpi xmlns:a14="http://schemas.microsoft.com/office/drawing/2010/main" val="0"/>
-              </a:ext>
-            </a:extLst>
-          </a:blip>
-          <a:srcRect/>
-          <a:stretch>
-            <a:fillRect/>
-          </a:stretch>
-        </p:blipFill>
-        <p:spPr bwMode="auto">
-          <a:xfrm>
-            <a:off x="1600199" y="1417638"/>
-            <a:ext cx="5943600" cy="1533526"/>
-          </a:xfrm>
-          <a:prstGeom prst="rect">
-            <a:avLst/>
-          </a:prstGeom>
-          <a:noFill/>
-          <a:extLst>
-            <a:ext uri="{909E8E84-426E-40DD-AFC4-6F175D3DCCD1}">
-              <a14:hiddenFill xmlns:a14="http://schemas.microsoft.com/office/drawing/2010/main">
-                <a:solidFill>
-                  <a:srgbClr val="FFFFFF"/>
-                </a:solidFill>
-              </a14:hiddenFill>
-            </a:ext>
-          </a:extLst>
-        </p:spPr>
-      </p:pic>
-    </p:spTree>
-    <p:extLst>
-      <p:ext uri="{BB962C8B-B14F-4D97-AF65-F5344CB8AC3E}">
-        <p14:creationId xmlns:p14="http://schemas.microsoft.com/office/powerpoint/2010/main" val="3419082356"/>
-      </p:ext>
-    </p:extLst>
   </p:cSld>
   <p:clrMapOvr>
     <a:masterClrMapping/>
@@ -17212,15 +15075,6 @@
 </file>
 
 <file path=customXml/item1.xml><?xml version="1.0" encoding="utf-8"?>
-<?mso-contentType ?>
-<FormTemplates xmlns="http://schemas.microsoft.com/sharepoint/v3/contenttype/forms">
-  <Display>DocumentLibraryForm</Display>
-  <Edit>DocumentLibraryForm</Edit>
-  <New>DocumentLibraryForm</New>
-</FormTemplates>
-</file>
-
-<file path=customXml/item2.xml><?xml version="1.0" encoding="utf-8"?>
 <ct:contentTypeSchema xmlns:ct="http://schemas.microsoft.com/office/2006/metadata/contentType" xmlns:ma="http://schemas.microsoft.com/office/2006/metadata/properties/metaAttributes" ct:_="" ma:_="" ma:contentTypeName="Document" ma:contentTypeID="0x0101001570BCAAD2E4294F9443DCB038A55380" ma:contentTypeVersion="8" ma:contentTypeDescription="Create a new document." ma:contentTypeScope="" ma:versionID="9523c79d6bab9e2ad858b5223ec5ed94">
   <xsd:schema xmlns:xsd="http://www.w3.org/2001/XMLSchema" xmlns:xs="http://www.w3.org/2001/XMLSchema" xmlns:p="http://schemas.microsoft.com/office/2006/metadata/properties" xmlns:ns2="201674f6-2bdd-4f13-ba1e-424e4aa70473" targetNamespace="http://schemas.microsoft.com/office/2006/metadata/properties" ma:root="true" ma:fieldsID="587afc94f70b507ec5be5f4d78229b0b" ns2:_="">
     <xsd:import namespace="201674f6-2bdd-4f13-ba1e-424e4aa70473"/>
@@ -17390,6 +15244,15 @@
 </ct:contentTypeSchema>
 </file>
 
+<file path=customXml/item2.xml><?xml version="1.0" encoding="utf-8"?>
+<?mso-contentType ?>
+<FormTemplates xmlns="http://schemas.microsoft.com/sharepoint/v3/contenttype/forms">
+  <Display>DocumentLibraryForm</Display>
+  <Edit>DocumentLibraryForm</Edit>
+  <New>DocumentLibraryForm</New>
+</FormTemplates>
+</file>
+
 <file path=customXml/item3.xml><?xml version="1.0" encoding="utf-8"?>
 <p:properties xmlns:p="http://schemas.microsoft.com/office/2006/metadata/properties" xmlns:xsi="http://www.w3.org/2001/XMLSchema-instance" xmlns:pc="http://schemas.microsoft.com/office/infopath/2007/PartnerControls">
   <documentManagement/>
@@ -17397,14 +15260,6 @@
 </file>
 
 <file path=customXml/itemProps1.xml><?xml version="1.0" encoding="utf-8"?>
-<ds:datastoreItem xmlns:ds="http://schemas.openxmlformats.org/officeDocument/2006/customXml" ds:itemID="{3C4378FB-03E6-44FD-B96F-DE665721A11C}">
-  <ds:schemaRefs>
-    <ds:schemaRef ds:uri="http://schemas.microsoft.com/sharepoint/v3/contenttype/forms"/>
-  </ds:schemaRefs>
-</ds:datastoreItem>
-</file>
-
-<file path=customXml/itemProps2.xml><?xml version="1.0" encoding="utf-8"?>
 <ds:datastoreItem xmlns:ds="http://schemas.openxmlformats.org/officeDocument/2006/customXml" ds:itemID="{60F9EA22-5825-4E8D-9432-59C9592C3427}">
   <ds:schemaRefs>
     <ds:schemaRef ds:uri="http://schemas.microsoft.com/office/2006/metadata/contentType"/>
@@ -17422,6 +15277,14 @@
 </ds:datastoreItem>
 </file>
 
+<file path=customXml/itemProps2.xml><?xml version="1.0" encoding="utf-8"?>
+<ds:datastoreItem xmlns:ds="http://schemas.openxmlformats.org/officeDocument/2006/customXml" ds:itemID="{3C4378FB-03E6-44FD-B96F-DE665721A11C}">
+  <ds:schemaRefs>
+    <ds:schemaRef ds:uri="http://schemas.microsoft.com/sharepoint/v3/contenttype/forms"/>
+  </ds:schemaRefs>
+</ds:datastoreItem>
+</file>
+
 <file path=customXml/itemProps3.xml><?xml version="1.0" encoding="utf-8"?>
 <ds:datastoreItem xmlns:ds="http://schemas.openxmlformats.org/officeDocument/2006/customXml" ds:itemID="{72D20C57-C3B5-47E7-874B-37927E7B7865}">
   <ds:schemaRefs>
